--- a/modulo-04/04.02 - Entendendo o Conceito de Experiência do Usuário de Nível de Consumidor/04.02_UX_de_consumidor_com_SAP_Fiori_e_SAP_Build.pptx
+++ b/modulo-04/04.02 - Entendendo o Conceito de Experiência do Usuário de Nível de Consumidor/04.02_UX_de_consumidor_com_SAP_Fiori_e_SAP_Build.pptx
@@ -1906,7 +1906,7 @@
                   <a:srgbClr val="8FA3C7"/>
                 </a:solidFill>
               </a:rPr>
-              <a:t>ABAP Moderno · Módulo 05 — Extensibilidade Clean Core  ·  Aula 2 de 5 — UX de consumidor</a:t>
+              <a:t>ABAP Moderno · Módulo 04 — Extensibilidade Clean Core  ·  Aula 2 de 5 — UX de consumidor</a:t>
             </a:r>
             <a:endParaRPr lang="en-US" sz="900" dirty="0"/>
           </a:p>
@@ -2052,7 +2052,7 @@
                   <a:srgbClr val="556B82"/>
                 </a:solidFill>
               </a:rPr>
-              <a:t>ABAP Moderno · Módulo 05 — Extensibilidade Clean Core  ·  Aula 2 de 5 — UX de consumidor</a:t>
+              <a:t>ABAP Moderno · Módulo 04 — Extensibilidade Clean Core  ·  Aula 2 de 5 — UX de consumidor</a:t>
             </a:r>
             <a:endParaRPr lang="en-US" sz="900" dirty="0"/>
           </a:p>
@@ -2483,7 +2483,7 @@
                   <a:srgbClr val="89D1FF"/>
                 </a:solidFill>
               </a:rPr>
-              <a:t>MÓDULO 05 · AULA 02 DE 05</a:t>
+              <a:t>MÓDULO 04 · AULA 02 DE 05</a:t>
             </a:r>
             <a:endParaRPr lang="en-US" sz="1400" dirty="0"/>
           </a:p>
@@ -2781,7 +2781,7 @@
                   <a:srgbClr val="8FA3C7"/>
                 </a:solidFill>
               </a:rPr>
-              <a:t>ABAP Moderno · Módulo 05 — Extensibilidade Clean Core · Design System SAP Horizon</a:t>
+              <a:t>ABAP Moderno · Módulo 04 — Extensibilidade Clean Core · Design System SAP Horizon</a:t>
             </a:r>
             <a:endParaRPr lang="en-US" sz="1100" dirty="0"/>
           </a:p>
@@ -4523,8 +4523,8 @@
         </p:blipFill>
         <p:spPr>
           <a:xfrm>
-            <a:off x="4474731" y="2084832"/>
-            <a:ext cx="365760" cy="365760"/>
+            <a:off x="4594372" y="3928994"/>
+            <a:ext cx="225308" cy="225308"/>
           </a:xfrm>
           <a:prstGeom prst="rect">
             <a:avLst/>
@@ -4547,7 +4547,7 @@
         </p:blipFill>
         <p:spPr>
           <a:xfrm>
-            <a:off x="7351205" y="2084832"/>
+            <a:off x="10227678" y="2084832"/>
             <a:ext cx="365760" cy="365760"/>
           </a:xfrm>
           <a:prstGeom prst="rect">
@@ -4571,8 +4571,8 @@
         </p:blipFill>
         <p:spPr>
           <a:xfrm>
-            <a:off x="10227678" y="2084832"/>
-            <a:ext cx="365760" cy="365760"/>
+            <a:off x="820034" y="3928994"/>
+            <a:ext cx="225308" cy="225308"/>
           </a:xfrm>
           <a:prstGeom prst="rect">
             <a:avLst/>
@@ -4595,7 +4595,7 @@
         </p:blipFill>
         <p:spPr>
           <a:xfrm>
-            <a:off x="820034" y="3928994"/>
+            <a:off x="8368711" y="3928994"/>
             <a:ext cx="225308" cy="225308"/>
           </a:xfrm>
           <a:prstGeom prst="rect">
@@ -4619,8 +4619,8 @@
         </p:blipFill>
         <p:spPr>
           <a:xfrm>
-            <a:off x="8368711" y="3928994"/>
-            <a:ext cx="225308" cy="225308"/>
+            <a:off x="4474731" y="2084832"/>
+            <a:ext cx="365760" cy="365760"/>
           </a:xfrm>
           <a:prstGeom prst="rect">
             <a:avLst/>
@@ -4643,8 +4643,8 @@
         </p:blipFill>
         <p:spPr>
           <a:xfrm>
-            <a:off x="4594372" y="3928994"/>
-            <a:ext cx="225308" cy="225308"/>
+            <a:off x="7351205" y="2084832"/>
+            <a:ext cx="365760" cy="365760"/>
           </a:xfrm>
           <a:prstGeom prst="rect">
             <a:avLst/>
@@ -4773,7 +4773,7 @@
                   <a:srgbClr val="89D1FF"/>
                 </a:solidFill>
               </a:rPr>
-              <a:t>AULA 05.02 · SEÇÃO 3</a:t>
+              <a:t>AULA 04.02 · SEÇÃO 3</a:t>
             </a:r>
             <a:endParaRPr lang="en-US" sz="1300" dirty="0"/>
           </a:p>
@@ -5728,7 +5728,7 @@
         </p:blipFill>
         <p:spPr>
           <a:xfrm>
-            <a:off x="877824" y="2684907"/>
+            <a:off x="6562192" y="2684907"/>
             <a:ext cx="256032" cy="256032"/>
           </a:xfrm>
           <a:prstGeom prst="rect">
@@ -5776,7 +5776,7 @@
         </p:blipFill>
         <p:spPr>
           <a:xfrm>
-            <a:off x="6562192" y="2684907"/>
+            <a:off x="877824" y="2684907"/>
             <a:ext cx="256032" cy="256032"/>
           </a:xfrm>
           <a:prstGeom prst="rect">
@@ -6571,7 +6571,7 @@
                   <a:srgbClr val="FFFFFF"/>
                 </a:solidFill>
               </a:rPr>
-              <a:t>O que aprendemos na aula 05.02</a:t>
+              <a:t>O que aprendemos na aula 04.02</a:t>
             </a:r>
             <a:endParaRPr lang="en-US" sz="3200" dirty="0"/>
           </a:p>
@@ -7079,7 +7079,7 @@
                   <a:srgbClr val="89D1FF"/>
                 </a:solidFill>
               </a:rPr>
-              <a:t>Próxima aula · 05.03  </a:t>
+              <a:t>Próxima aula · 04.03  </a:t>
             </a:r>
             <a:r>
               <a:rPr lang="en-US" sz="1500" dirty="0">
@@ -7133,7 +7133,7 @@
         </p:blipFill>
         <p:spPr>
           <a:xfrm>
-            <a:off x="822960" y="2926080"/>
+            <a:off x="6355080" y="1965960"/>
             <a:ext cx="256032" cy="256032"/>
           </a:xfrm>
           <a:prstGeom prst="rect">
@@ -7157,7 +7157,7 @@
         </p:blipFill>
         <p:spPr>
           <a:xfrm>
-            <a:off x="6355080" y="1965960"/>
+            <a:off x="822960" y="2926080"/>
             <a:ext cx="256032" cy="256032"/>
           </a:xfrm>
           <a:prstGeom prst="rect">
@@ -7205,7 +7205,7 @@
         </p:blipFill>
         <p:spPr>
           <a:xfrm>
-            <a:off x="6355080" y="3886200"/>
+            <a:off x="822960" y="3886200"/>
             <a:ext cx="256032" cy="256032"/>
           </a:xfrm>
           <a:prstGeom prst="rect">
@@ -7229,7 +7229,7 @@
         </p:blipFill>
         <p:spPr>
           <a:xfrm>
-            <a:off x="822960" y="3886200"/>
+            <a:off x="6355080" y="3886200"/>
             <a:ext cx="256032" cy="256032"/>
           </a:xfrm>
           <a:prstGeom prst="rect">
@@ -7356,7 +7356,7 @@
                   <a:srgbClr val="1D2D3E"/>
                 </a:solidFill>
               </a:rPr>
-              <a:t>Módulo 05 em 5 aulas: Clean Core e extensibilidade</a:t>
+              <a:t>Módulo 04 em 5 aulas: Clean Core e extensibilidade</a:t>
             </a:r>
             <a:endParaRPr lang="en-US" sz="2800" dirty="0"/>
           </a:p>
@@ -8336,7 +8336,7 @@
         </p:blipFill>
         <p:spPr>
           <a:xfrm>
-            <a:off x="4328038" y="1847088"/>
+            <a:off x="11094415" y="1847088"/>
             <a:ext cx="347472" cy="347472"/>
           </a:xfrm>
           <a:prstGeom prst="rect">
@@ -8384,7 +8384,7 @@
         </p:blipFill>
         <p:spPr>
           <a:xfrm>
-            <a:off x="8838956" y="1847088"/>
+            <a:off x="4328038" y="1847088"/>
             <a:ext cx="347472" cy="347472"/>
           </a:xfrm>
           <a:prstGeom prst="rect">
@@ -8408,7 +8408,7 @@
         </p:blipFill>
         <p:spPr>
           <a:xfrm>
-            <a:off x="11094415" y="1847088"/>
+            <a:off x="8838956" y="1847088"/>
             <a:ext cx="347472" cy="347472"/>
           </a:xfrm>
           <a:prstGeom prst="rect">
@@ -9180,7 +9180,7 @@
         </p:blipFill>
         <p:spPr>
           <a:xfrm>
-            <a:off x="6511900" y="3166872"/>
+            <a:off x="3681146" y="3166872"/>
             <a:ext cx="256032" cy="256032"/>
           </a:xfrm>
           <a:prstGeom prst="rect">
@@ -9204,7 +9204,7 @@
         </p:blipFill>
         <p:spPr>
           <a:xfrm>
-            <a:off x="3681146" y="3166872"/>
+            <a:off x="6511900" y="3166872"/>
             <a:ext cx="256032" cy="256032"/>
           </a:xfrm>
           <a:prstGeom prst="rect">
@@ -9382,7 +9382,7 @@
                   <a:srgbClr val="89D1FF"/>
                 </a:solidFill>
               </a:rPr>
-              <a:t>AULA 05.02 · SEÇÃO 1</a:t>
+              <a:t>AULA 04.02 · SEÇÃO 1</a:t>
             </a:r>
             <a:endParaRPr lang="en-US" sz="1300" dirty="0"/>
           </a:p>
@@ -11183,7 +11183,7 @@
         </p:blipFill>
         <p:spPr>
           <a:xfrm>
-            <a:off x="850392" y="3102356"/>
+            <a:off x="5379598" y="3102356"/>
             <a:ext cx="256032" cy="256032"/>
           </a:xfrm>
           <a:prstGeom prst="rect">
@@ -11207,7 +11207,7 @@
         </p:blipFill>
         <p:spPr>
           <a:xfrm>
-            <a:off x="3114995" y="3102356"/>
+            <a:off x="9908804" y="3102356"/>
             <a:ext cx="256032" cy="256032"/>
           </a:xfrm>
           <a:prstGeom prst="rect">
@@ -11231,7 +11231,7 @@
         </p:blipFill>
         <p:spPr>
           <a:xfrm>
-            <a:off x="7644201" y="3102356"/>
+            <a:off x="850392" y="3102356"/>
             <a:ext cx="256032" cy="256032"/>
           </a:xfrm>
           <a:prstGeom prst="rect">
@@ -11255,7 +11255,7 @@
         </p:blipFill>
         <p:spPr>
           <a:xfrm>
-            <a:off x="5379598" y="3102356"/>
+            <a:off x="7644201" y="3102356"/>
             <a:ext cx="256032" cy="256032"/>
           </a:xfrm>
           <a:prstGeom prst="rect">
@@ -11279,7 +11279,7 @@
         </p:blipFill>
         <p:spPr>
           <a:xfrm>
-            <a:off x="9908804" y="3102356"/>
+            <a:off x="3114995" y="3102356"/>
             <a:ext cx="256032" cy="256032"/>
           </a:xfrm>
           <a:prstGeom prst="rect">
@@ -11409,7 +11409,7 @@
                   <a:srgbClr val="89D1FF"/>
                 </a:solidFill>
               </a:rPr>
-              <a:t>AULA 05.02 · SEÇÃO 2</a:t>
+              <a:t>AULA 04.02 · SEÇÃO 2</a:t>
             </a:r>
             <a:endParaRPr lang="en-US" sz="1300" dirty="0"/>
           </a:p>
@@ -12388,7 +12388,7 @@
         </p:blipFill>
         <p:spPr>
           <a:xfrm>
-            <a:off x="877824" y="2792063"/>
+            <a:off x="6562192" y="2792063"/>
             <a:ext cx="256032" cy="256032"/>
           </a:xfrm>
           <a:prstGeom prst="rect">
@@ -12412,7 +12412,7 @@
         </p:blipFill>
         <p:spPr>
           <a:xfrm>
-            <a:off x="6562192" y="2792063"/>
+            <a:off x="877824" y="2792063"/>
             <a:ext cx="256032" cy="256032"/>
           </a:xfrm>
           <a:prstGeom prst="rect">
@@ -12648,7 +12648,7 @@
         <p:spPr>
           <a:xfrm>
             <a:off x="640080" y="1700784"/>
-            <a:ext cx="2075688" cy="292608"/>
+            <a:ext cx="2619756" cy="292608"/>
           </a:xfrm>
           <a:prstGeom prst="rect">
             <a:avLst/>
@@ -12668,7 +12668,7 @@
         <p:spPr>
           <a:xfrm>
             <a:off x="640080" y="1700784"/>
-            <a:ext cx="2075688" cy="27432"/>
+            <a:ext cx="2619756" cy="27432"/>
           </a:xfrm>
           <a:prstGeom prst="rect">
             <a:avLst/>
@@ -12688,7 +12688,7 @@
         <p:spPr>
           <a:xfrm>
             <a:off x="731520" y="1719072"/>
-            <a:ext cx="1892808" cy="274320"/>
+            <a:ext cx="2436876" cy="274320"/>
           </a:xfrm>
           <a:prstGeom prst="rect">
             <a:avLst/>
@@ -12709,7 +12709,7 @@
                   <a:srgbClr val="FFFFFF"/>
                 </a:solidFill>
               </a:rPr>
-              <a:t>zc_travel.ddlx.asddlxs</a:t>
+              <a:t>zc_pc_pedido_app.ddlx.asddlxs</a:t>
             </a:r>
             <a:endParaRPr lang="en-US" sz="950" dirty="0"/>
           </a:p>
@@ -12745,7 +12745,7 @@
                   <a:srgbClr val="9DA5B4"/>
                 </a:solidFill>
               </a:rPr>
-              <a:t>ZS4D426 › Metadata Extension</a:t>
+              <a:t>ZAVBS_PC_PEDIDOS › ZC_PC_PEDIDO_APP (simplificada)</a:t>
             </a:r>
             <a:endParaRPr lang="en-US" sz="850" dirty="0"/>
           </a:p>
@@ -13206,7 +13206,7 @@
                 <a:ea typeface="Courier New" pitchFamily="34" charset="-122"/>
                 <a:cs typeface="Courier New" pitchFamily="34" charset="-120"/>
               </a:rPr>
-              <a:t>CUSTOMER</a:t>
+              <a:t>CORE</a:t>
             </a:r>
             <a:endParaRPr lang="en-US" sz="1050" dirty="0"/>
           </a:p>
@@ -13347,73 +13347,7 @@
                 <a:ea typeface="Courier New" pitchFamily="34" charset="-122"/>
                 <a:cs typeface="Courier New" pitchFamily="34" charset="-120"/>
               </a:rPr>
-              <a:t>'Viagem'</a:t>
-            </a:r>
-            <a:r>
-              <a:rPr lang="en-US" sz="1050" dirty="0">
-                <a:solidFill>
-                  <a:srgbClr val="CCCCCC"/>
-                </a:solidFill>
-                <a:latin typeface="Courier New" pitchFamily="34" charset="0"/>
-                <a:ea typeface="Courier New" pitchFamily="34" charset="-122"/>
-                <a:cs typeface="Courier New" pitchFamily="34" charset="-120"/>
-              </a:rPr>
-              <a:t>,</a:t>
-            </a:r>
-            <a:r>
-              <a:rPr lang="en-US" sz="1050" dirty="0">
-                <a:solidFill>
-                  <a:srgbClr val="CCCCCC"/>
-                </a:solidFill>
-                <a:latin typeface="Courier New" pitchFamily="34" charset="0"/>
-                <a:ea typeface="Courier New" pitchFamily="34" charset="-122"/>
-                <a:cs typeface="Courier New" pitchFamily="34" charset="-120"/>
-              </a:rPr>
-              <a:t> </a:t>
-            </a:r>
-            <a:r>
-              <a:rPr lang="en-US" sz="1050" dirty="0">
-                <a:solidFill>
-                  <a:srgbClr val="CCCCCC"/>
-                </a:solidFill>
-                <a:latin typeface="Courier New" pitchFamily="34" charset="0"/>
-                <a:ea typeface="Courier New" pitchFamily="34" charset="-122"/>
-                <a:cs typeface="Courier New" pitchFamily="34" charset="-120"/>
-              </a:rPr>
-              <a:t>typeNamePlural</a:t>
-            </a:r>
-            <a:r>
-              <a:rPr lang="en-US" sz="1050" dirty="0">
-                <a:solidFill>
-                  <a:srgbClr val="CCCCCC"/>
-                </a:solidFill>
-                <a:latin typeface="Courier New" pitchFamily="34" charset="0"/>
-                <a:ea typeface="Courier New" pitchFamily="34" charset="-122"/>
-                <a:cs typeface="Courier New" pitchFamily="34" charset="-120"/>
-              </a:rPr>
-              <a:t>:</a:t>
-            </a:r>
-            <a:r>
-              <a:rPr lang="en-US" sz="1050" dirty="0">
-                <a:solidFill>
-                  <a:srgbClr val="CCCCCC"/>
-                </a:solidFill>
-                <a:latin typeface="Courier New" pitchFamily="34" charset="0"/>
-                <a:ea typeface="Courier New" pitchFamily="34" charset="-122"/>
-                <a:cs typeface="Courier New" pitchFamily="34" charset="-120"/>
-              </a:rPr>
-              <a:t> </a:t>
-            </a:r>
-            <a:r>
-              <a:rPr lang="en-US" sz="1050" dirty="0">
-                <a:solidFill>
-                  <a:srgbClr val="CE9178"/>
-                </a:solidFill>
-                <a:latin typeface="Courier New" pitchFamily="34" charset="0"/>
-                <a:ea typeface="Courier New" pitchFamily="34" charset="-122"/>
-                <a:cs typeface="Courier New" pitchFamily="34" charset="-120"/>
-              </a:rPr>
-              <a:t>'Viagens'</a:t>
+              <a:t>'Pedido de compra'</a:t>
             </a:r>
             <a:r>
               <a:rPr lang="en-US" sz="1050" dirty="0">
@@ -13455,7 +13389,7 @@
                 <a:ea typeface="Courier New" pitchFamily="34" charset="-122"/>
                 <a:cs typeface="Courier New" pitchFamily="34" charset="-120"/>
               </a:rPr>
-              <a:t>title</a:t>
+              <a:t>typeNamePlural</a:t>
             </a:r>
             <a:r>
               <a:rPr lang="en-US" sz="1050" dirty="0">
@@ -13482,112 +13416,24 @@
             <a:r>
               <a:rPr lang="en-US" sz="1050" dirty="0">
                 <a:solidFill>
-                  <a:srgbClr val="CCCCCC"/>
-                </a:solidFill>
-                <a:latin typeface="Courier New" pitchFamily="34" charset="0"/>
-                <a:ea typeface="Courier New" pitchFamily="34" charset="-122"/>
-                <a:cs typeface="Courier New" pitchFamily="34" charset="-120"/>
-              </a:rPr>
-              <a:t>{</a:t>
-            </a:r>
-            <a:r>
-              <a:rPr lang="en-US" sz="1050" dirty="0">
-                <a:solidFill>
-                  <a:srgbClr val="CCCCCC"/>
-                </a:solidFill>
-                <a:latin typeface="Courier New" pitchFamily="34" charset="0"/>
-                <a:ea typeface="Courier New" pitchFamily="34" charset="-122"/>
-                <a:cs typeface="Courier New" pitchFamily="34" charset="-120"/>
-              </a:rPr>
-              <a:t> </a:t>
-            </a:r>
-            <a:r>
-              <a:rPr lang="en-US" sz="1050" dirty="0">
-                <a:solidFill>
-                  <a:srgbClr val="CCCCCC"/>
-                </a:solidFill>
-                <a:latin typeface="Courier New" pitchFamily="34" charset="0"/>
-                <a:ea typeface="Courier New" pitchFamily="34" charset="-122"/>
-                <a:cs typeface="Courier New" pitchFamily="34" charset="-120"/>
-              </a:rPr>
-              <a:t>value</a:t>
-            </a:r>
-            <a:r>
-              <a:rPr lang="en-US" sz="1050" dirty="0">
-                <a:solidFill>
-                  <a:srgbClr val="CCCCCC"/>
-                </a:solidFill>
-                <a:latin typeface="Courier New" pitchFamily="34" charset="0"/>
-                <a:ea typeface="Courier New" pitchFamily="34" charset="-122"/>
-                <a:cs typeface="Courier New" pitchFamily="34" charset="-120"/>
-              </a:rPr>
-              <a:t>:</a:t>
-            </a:r>
-            <a:r>
-              <a:rPr lang="en-US" sz="1050" dirty="0">
-                <a:solidFill>
-                  <a:srgbClr val="CCCCCC"/>
-                </a:solidFill>
-                <a:latin typeface="Courier New" pitchFamily="34" charset="0"/>
-                <a:ea typeface="Courier New" pitchFamily="34" charset="-122"/>
-                <a:cs typeface="Courier New" pitchFamily="34" charset="-120"/>
-              </a:rPr>
-              <a:t> </a:t>
-            </a:r>
-            <a:r>
-              <a:rPr lang="en-US" sz="1050" dirty="0">
-                <a:solidFill>
                   <a:srgbClr val="CE9178"/>
                 </a:solidFill>
                 <a:latin typeface="Courier New" pitchFamily="34" charset="0"/>
                 <a:ea typeface="Courier New" pitchFamily="34" charset="-122"/>
                 <a:cs typeface="Courier New" pitchFamily="34" charset="-120"/>
               </a:rPr>
-              <a:t>'TravelID'</a:t>
-            </a:r>
-            <a:r>
-              <a:rPr lang="en-US" sz="1050" dirty="0">
-                <a:solidFill>
-                  <a:srgbClr val="CCCCCC"/>
-                </a:solidFill>
-                <a:latin typeface="Courier New" pitchFamily="34" charset="0"/>
-                <a:ea typeface="Courier New" pitchFamily="34" charset="-122"/>
-                <a:cs typeface="Courier New" pitchFamily="34" charset="-120"/>
-              </a:rPr>
-              <a:t> </a:t>
-            </a:r>
-            <a:r>
-              <a:rPr lang="en-US" sz="1050" dirty="0">
-                <a:solidFill>
-                  <a:srgbClr val="CCCCCC"/>
-                </a:solidFill>
-                <a:latin typeface="Courier New" pitchFamily="34" charset="0"/>
-                <a:ea typeface="Courier New" pitchFamily="34" charset="-122"/>
-                <a:cs typeface="Courier New" pitchFamily="34" charset="-120"/>
-              </a:rPr>
-              <a:t>}</a:t>
-            </a:r>
-            <a:r>
-              <a:rPr lang="en-US" sz="1050" dirty="0">
-                <a:solidFill>
-                  <a:srgbClr val="CCCCCC"/>
-                </a:solidFill>
-                <a:latin typeface="Courier New" pitchFamily="34" charset="0"/>
-                <a:ea typeface="Courier New" pitchFamily="34" charset="-122"/>
-                <a:cs typeface="Courier New" pitchFamily="34" charset="-120"/>
-              </a:rPr>
-              <a:t> </a:t>
-            </a:r>
-            <a:r>
-              <a:rPr lang="en-US" sz="1050" dirty="0">
-                <a:solidFill>
-                  <a:srgbClr val="CCCCCC"/>
-                </a:solidFill>
-                <a:latin typeface="Courier New" pitchFamily="34" charset="0"/>
-                <a:ea typeface="Courier New" pitchFamily="34" charset="-122"/>
-                <a:cs typeface="Courier New" pitchFamily="34" charset="-120"/>
-              </a:rPr>
-              <a:t>}</a:t>
+              <a:t>'Pedidos de compras'</a:t>
+            </a:r>
+            <a:r>
+              <a:rPr lang="en-US" sz="1050" dirty="0">
+                <a:solidFill>
+                  <a:srgbClr val="CCCCCC"/>
+                </a:solidFill>
+                <a:latin typeface="Courier New" pitchFamily="34" charset="0"/>
+                <a:ea typeface="Courier New" pitchFamily="34" charset="-122"/>
+                <a:cs typeface="Courier New" pitchFamily="34" charset="-120"/>
+              </a:rPr>
+              <a:t>,</a:t>
             </a:r>
             <a:endParaRPr lang="en-US" sz="1050" dirty="0"/>
           </a:p>
@@ -13607,7 +13453,29 @@
                 <a:ea typeface="Courier New" pitchFamily="34" charset="-122"/>
                 <a:cs typeface="Courier New" pitchFamily="34" charset="-120"/>
               </a:rPr>
-              <a:t>annotate</a:t>
+              <a:t>                  </a:t>
+            </a:r>
+            <a:r>
+              <a:rPr lang="en-US" sz="1050" dirty="0">
+                <a:solidFill>
+                  <a:srgbClr val="CCCCCC"/>
+                </a:solidFill>
+                <a:latin typeface="Courier New" pitchFamily="34" charset="0"/>
+                <a:ea typeface="Courier New" pitchFamily="34" charset="-122"/>
+                <a:cs typeface="Courier New" pitchFamily="34" charset="-120"/>
+              </a:rPr>
+              <a:t>title</a:t>
+            </a:r>
+            <a:r>
+              <a:rPr lang="en-US" sz="1050" dirty="0">
+                <a:solidFill>
+                  <a:srgbClr val="CCCCCC"/>
+                </a:solidFill>
+                <a:latin typeface="Courier New" pitchFamily="34" charset="0"/>
+                <a:ea typeface="Courier New" pitchFamily="34" charset="-122"/>
+                <a:cs typeface="Courier New" pitchFamily="34" charset="-120"/>
+              </a:rPr>
+              <a:t>:</a:t>
             </a:r>
             <a:r>
               <a:rPr lang="en-US" sz="1050" dirty="0">
@@ -13629,7 +13497,7 @@
                 <a:ea typeface="Courier New" pitchFamily="34" charset="-122"/>
                 <a:cs typeface="Courier New" pitchFamily="34" charset="-120"/>
               </a:rPr>
-              <a:t>entity</a:t>
+              <a:t>{</a:t>
             </a:r>
             <a:r>
               <a:rPr lang="en-US" sz="1050" dirty="0">
@@ -13651,7 +13519,18 @@
                 <a:ea typeface="Courier New" pitchFamily="34" charset="-122"/>
                 <a:cs typeface="Courier New" pitchFamily="34" charset="-120"/>
               </a:rPr>
-              <a:t>ZC_Travel</a:t>
+              <a:t>value</a:t>
+            </a:r>
+            <a:r>
+              <a:rPr lang="en-US" sz="1050" dirty="0">
+                <a:solidFill>
+                  <a:srgbClr val="CCCCCC"/>
+                </a:solidFill>
+                <a:latin typeface="Courier New" pitchFamily="34" charset="0"/>
+                <a:ea typeface="Courier New" pitchFamily="34" charset="-122"/>
+                <a:cs typeface="Courier New" pitchFamily="34" charset="-120"/>
+              </a:rPr>
+              <a:t>:</a:t>
             </a:r>
             <a:r>
               <a:rPr lang="en-US" sz="1050" dirty="0">
@@ -13667,13 +13546,57 @@
             <a:r>
               <a:rPr lang="en-US" sz="1050" dirty="0">
                 <a:solidFill>
-                  <a:srgbClr val="CCCCCC"/>
-                </a:solidFill>
-                <a:latin typeface="Courier New" pitchFamily="34" charset="0"/>
-                <a:ea typeface="Courier New" pitchFamily="34" charset="-122"/>
-                <a:cs typeface="Courier New" pitchFamily="34" charset="-120"/>
-              </a:rPr>
-              <a:t>with</a:t>
+                  <a:srgbClr val="CE9178"/>
+                </a:solidFill>
+                <a:latin typeface="Courier New" pitchFamily="34" charset="0"/>
+                <a:ea typeface="Courier New" pitchFamily="34" charset="-122"/>
+                <a:cs typeface="Courier New" pitchFamily="34" charset="-120"/>
+              </a:rPr>
+              <a:t>'NumeroPedido'</a:t>
+            </a:r>
+            <a:r>
+              <a:rPr lang="en-US" sz="1050" dirty="0">
+                <a:solidFill>
+                  <a:srgbClr val="CCCCCC"/>
+                </a:solidFill>
+                <a:latin typeface="Courier New" pitchFamily="34" charset="0"/>
+                <a:ea typeface="Courier New" pitchFamily="34" charset="-122"/>
+                <a:cs typeface="Courier New" pitchFamily="34" charset="-120"/>
+              </a:rPr>
+              <a:t> </a:t>
+            </a:r>
+            <a:r>
+              <a:rPr lang="en-US" sz="1050" dirty="0">
+                <a:solidFill>
+                  <a:srgbClr val="CCCCCC"/>
+                </a:solidFill>
+                <a:latin typeface="Courier New" pitchFamily="34" charset="0"/>
+                <a:ea typeface="Courier New" pitchFamily="34" charset="-122"/>
+                <a:cs typeface="Courier New" pitchFamily="34" charset="-120"/>
+              </a:rPr>
+              <a:t>}</a:t>
+            </a:r>
+            <a:r>
+              <a:rPr lang="en-US" sz="1050" dirty="0">
+                <a:solidFill>
+                  <a:srgbClr val="CCCCCC"/>
+                </a:solidFill>
+                <a:latin typeface="Courier New" pitchFamily="34" charset="0"/>
+                <a:ea typeface="Courier New" pitchFamily="34" charset="-122"/>
+                <a:cs typeface="Courier New" pitchFamily="34" charset="-120"/>
+              </a:rPr>
+              <a:t> </a:t>
+            </a:r>
+            <a:r>
+              <a:rPr lang="en-US" sz="1050" dirty="0">
+                <a:solidFill>
+                  <a:srgbClr val="CCCCCC"/>
+                </a:solidFill>
+                <a:latin typeface="Courier New" pitchFamily="34" charset="0"/>
+                <a:ea typeface="Courier New" pitchFamily="34" charset="-122"/>
+                <a:cs typeface="Courier New" pitchFamily="34" charset="-120"/>
+              </a:rPr>
+              <a:t>}</a:t>
             </a:r>
             <a:endParaRPr lang="en-US" sz="1050" dirty="0"/>
           </a:p>
@@ -13693,7 +13616,73 @@
                 <a:ea typeface="Courier New" pitchFamily="34" charset="-122"/>
                 <a:cs typeface="Courier New" pitchFamily="34" charset="-120"/>
               </a:rPr>
-              <a:t>{</a:t>
+              <a:t>annotate</a:t>
+            </a:r>
+            <a:r>
+              <a:rPr lang="en-US" sz="1050" dirty="0">
+                <a:solidFill>
+                  <a:srgbClr val="CCCCCC"/>
+                </a:solidFill>
+                <a:latin typeface="Courier New" pitchFamily="34" charset="0"/>
+                <a:ea typeface="Courier New" pitchFamily="34" charset="-122"/>
+                <a:cs typeface="Courier New" pitchFamily="34" charset="-120"/>
+              </a:rPr>
+              <a:t> </a:t>
+            </a:r>
+            <a:r>
+              <a:rPr lang="en-US" sz="1050" dirty="0">
+                <a:solidFill>
+                  <a:srgbClr val="CCCCCC"/>
+                </a:solidFill>
+                <a:latin typeface="Courier New" pitchFamily="34" charset="0"/>
+                <a:ea typeface="Courier New" pitchFamily="34" charset="-122"/>
+                <a:cs typeface="Courier New" pitchFamily="34" charset="-120"/>
+              </a:rPr>
+              <a:t>entity</a:t>
+            </a:r>
+            <a:r>
+              <a:rPr lang="en-US" sz="1050" dirty="0">
+                <a:solidFill>
+                  <a:srgbClr val="CCCCCC"/>
+                </a:solidFill>
+                <a:latin typeface="Courier New" pitchFamily="34" charset="0"/>
+                <a:ea typeface="Courier New" pitchFamily="34" charset="-122"/>
+                <a:cs typeface="Courier New" pitchFamily="34" charset="-120"/>
+              </a:rPr>
+              <a:t> </a:t>
+            </a:r>
+            <a:r>
+              <a:rPr lang="en-US" sz="1050" dirty="0">
+                <a:solidFill>
+                  <a:srgbClr val="CCCCCC"/>
+                </a:solidFill>
+                <a:latin typeface="Courier New" pitchFamily="34" charset="0"/>
+                <a:ea typeface="Courier New" pitchFamily="34" charset="-122"/>
+                <a:cs typeface="Courier New" pitchFamily="34" charset="-120"/>
+              </a:rPr>
+              <a:t>ZC_PC_PEDIDO_APP</a:t>
+            </a:r>
+            <a:r>
+              <a:rPr lang="en-US" sz="1050" dirty="0">
+                <a:solidFill>
+                  <a:srgbClr val="CCCCCC"/>
+                </a:solidFill>
+                <a:latin typeface="Courier New" pitchFamily="34" charset="0"/>
+                <a:ea typeface="Courier New" pitchFamily="34" charset="-122"/>
+                <a:cs typeface="Courier New" pitchFamily="34" charset="-120"/>
+              </a:rPr>
+              <a:t> </a:t>
+            </a:r>
+            <a:r>
+              <a:rPr lang="en-US" sz="1050" dirty="0">
+                <a:solidFill>
+                  <a:srgbClr val="CCCCCC"/>
+                </a:solidFill>
+                <a:latin typeface="Courier New" pitchFamily="34" charset="0"/>
+                <a:ea typeface="Courier New" pitchFamily="34" charset="-122"/>
+                <a:cs typeface="Courier New" pitchFamily="34" charset="-120"/>
+              </a:rPr>
+              <a:t>with</a:t>
             </a:r>
             <a:endParaRPr lang="en-US" sz="1050" dirty="0"/>
           </a:p>
@@ -13713,238 +13702,7 @@
                 <a:ea typeface="Courier New" pitchFamily="34" charset="-122"/>
                 <a:cs typeface="Courier New" pitchFamily="34" charset="-120"/>
               </a:rPr>
-              <a:t>  </a:t>
-            </a:r>
-            <a:r>
-              <a:rPr lang="en-US" sz="1050" dirty="0">
-                <a:solidFill>
-                  <a:srgbClr val="CCCCCC"/>
-                </a:solidFill>
-                <a:latin typeface="Courier New" pitchFamily="34" charset="0"/>
-                <a:ea typeface="Courier New" pitchFamily="34" charset="-122"/>
-                <a:cs typeface="Courier New" pitchFamily="34" charset="-120"/>
-              </a:rPr>
-              <a:t>@</a:t>
-            </a:r>
-            <a:r>
-              <a:rPr lang="en-US" sz="1050" dirty="0">
-                <a:solidFill>
-                  <a:srgbClr val="CCCCCC"/>
-                </a:solidFill>
-                <a:latin typeface="Courier New" pitchFamily="34" charset="0"/>
-                <a:ea typeface="Courier New" pitchFamily="34" charset="-122"/>
-                <a:cs typeface="Courier New" pitchFamily="34" charset="-120"/>
-              </a:rPr>
-              <a:t>UI</a:t>
-            </a:r>
-            <a:r>
-              <a:rPr lang="en-US" sz="1050" dirty="0">
-                <a:solidFill>
-                  <a:srgbClr val="CCCCCC"/>
-                </a:solidFill>
-                <a:latin typeface="Courier New" pitchFamily="34" charset="0"/>
-                <a:ea typeface="Courier New" pitchFamily="34" charset="-122"/>
-                <a:cs typeface="Courier New" pitchFamily="34" charset="-120"/>
-              </a:rPr>
-              <a:t>.</a:t>
-            </a:r>
-            <a:r>
-              <a:rPr lang="en-US" sz="1050" dirty="0">
-                <a:solidFill>
-                  <a:srgbClr val="CCCCCC"/>
-                </a:solidFill>
-                <a:latin typeface="Courier New" pitchFamily="34" charset="0"/>
-                <a:ea typeface="Courier New" pitchFamily="34" charset="-122"/>
-                <a:cs typeface="Courier New" pitchFamily="34" charset="-120"/>
-              </a:rPr>
-              <a:t>facet</a:t>
-            </a:r>
-            <a:r>
-              <a:rPr lang="en-US" sz="1050" dirty="0">
-                <a:solidFill>
-                  <a:srgbClr val="CCCCCC"/>
-                </a:solidFill>
-                <a:latin typeface="Courier New" pitchFamily="34" charset="0"/>
-                <a:ea typeface="Courier New" pitchFamily="34" charset="-122"/>
-                <a:cs typeface="Courier New" pitchFamily="34" charset="-120"/>
-              </a:rPr>
-              <a:t>:</a:t>
-            </a:r>
-            <a:r>
-              <a:rPr lang="en-US" sz="1050" dirty="0">
-                <a:solidFill>
-                  <a:srgbClr val="CCCCCC"/>
-                </a:solidFill>
-                <a:latin typeface="Courier New" pitchFamily="34" charset="0"/>
-                <a:ea typeface="Courier New" pitchFamily="34" charset="-122"/>
-                <a:cs typeface="Courier New" pitchFamily="34" charset="-120"/>
-              </a:rPr>
-              <a:t> </a:t>
-            </a:r>
-            <a:r>
-              <a:rPr lang="en-US" sz="1050" dirty="0">
-                <a:solidFill>
-                  <a:srgbClr val="CCCCCC"/>
-                </a:solidFill>
-                <a:latin typeface="Courier New" pitchFamily="34" charset="0"/>
-                <a:ea typeface="Courier New" pitchFamily="34" charset="-122"/>
-                <a:cs typeface="Courier New" pitchFamily="34" charset="-120"/>
-              </a:rPr>
-              <a:t>[</a:t>
-            </a:r>
-            <a:r>
-              <a:rPr lang="en-US" sz="1050" dirty="0">
-                <a:solidFill>
-                  <a:srgbClr val="CCCCCC"/>
-                </a:solidFill>
-                <a:latin typeface="Courier New" pitchFamily="34" charset="0"/>
-                <a:ea typeface="Courier New" pitchFamily="34" charset="-122"/>
-                <a:cs typeface="Courier New" pitchFamily="34" charset="-120"/>
-              </a:rPr>
               <a:t>{</a:t>
-            </a:r>
-            <a:r>
-              <a:rPr lang="en-US" sz="1050" dirty="0">
-                <a:solidFill>
-                  <a:srgbClr val="CCCCCC"/>
-                </a:solidFill>
-                <a:latin typeface="Courier New" pitchFamily="34" charset="0"/>
-                <a:ea typeface="Courier New" pitchFamily="34" charset="-122"/>
-                <a:cs typeface="Courier New" pitchFamily="34" charset="-120"/>
-              </a:rPr>
-              <a:t> </a:t>
-            </a:r>
-            <a:r>
-              <a:rPr lang="en-US" sz="1050" dirty="0">
-                <a:solidFill>
-                  <a:srgbClr val="CCCCCC"/>
-                </a:solidFill>
-                <a:latin typeface="Courier New" pitchFamily="34" charset="0"/>
-                <a:ea typeface="Courier New" pitchFamily="34" charset="-122"/>
-                <a:cs typeface="Courier New" pitchFamily="34" charset="-120"/>
-              </a:rPr>
-              <a:t>id</a:t>
-            </a:r>
-            <a:r>
-              <a:rPr lang="en-US" sz="1050" dirty="0">
-                <a:solidFill>
-                  <a:srgbClr val="CCCCCC"/>
-                </a:solidFill>
-                <a:latin typeface="Courier New" pitchFamily="34" charset="0"/>
-                <a:ea typeface="Courier New" pitchFamily="34" charset="-122"/>
-                <a:cs typeface="Courier New" pitchFamily="34" charset="-120"/>
-              </a:rPr>
-              <a:t>:</a:t>
-            </a:r>
-            <a:r>
-              <a:rPr lang="en-US" sz="1050" dirty="0">
-                <a:solidFill>
-                  <a:srgbClr val="CCCCCC"/>
-                </a:solidFill>
-                <a:latin typeface="Courier New" pitchFamily="34" charset="0"/>
-                <a:ea typeface="Courier New" pitchFamily="34" charset="-122"/>
-                <a:cs typeface="Courier New" pitchFamily="34" charset="-120"/>
-              </a:rPr>
-              <a:t> </a:t>
-            </a:r>
-            <a:r>
-              <a:rPr lang="en-US" sz="1050" dirty="0">
-                <a:solidFill>
-                  <a:srgbClr val="CE9178"/>
-                </a:solidFill>
-                <a:latin typeface="Courier New" pitchFamily="34" charset="0"/>
-                <a:ea typeface="Courier New" pitchFamily="34" charset="-122"/>
-                <a:cs typeface="Courier New" pitchFamily="34" charset="-120"/>
-              </a:rPr>
-              <a:t>'Travel'</a:t>
-            </a:r>
-            <a:r>
-              <a:rPr lang="en-US" sz="1050" dirty="0">
-                <a:solidFill>
-                  <a:srgbClr val="CCCCCC"/>
-                </a:solidFill>
-                <a:latin typeface="Courier New" pitchFamily="34" charset="0"/>
-                <a:ea typeface="Courier New" pitchFamily="34" charset="-122"/>
-                <a:cs typeface="Courier New" pitchFamily="34" charset="-120"/>
-              </a:rPr>
-              <a:t>,</a:t>
-            </a:r>
-            <a:r>
-              <a:rPr lang="en-US" sz="1050" dirty="0">
-                <a:solidFill>
-                  <a:srgbClr val="CCCCCC"/>
-                </a:solidFill>
-                <a:latin typeface="Courier New" pitchFamily="34" charset="0"/>
-                <a:ea typeface="Courier New" pitchFamily="34" charset="-122"/>
-                <a:cs typeface="Courier New" pitchFamily="34" charset="-120"/>
-              </a:rPr>
-              <a:t> </a:t>
-            </a:r>
-            <a:r>
-              <a:rPr lang="en-US" sz="1050" dirty="0">
-                <a:solidFill>
-                  <a:srgbClr val="CCCCCC"/>
-                </a:solidFill>
-                <a:latin typeface="Courier New" pitchFamily="34" charset="0"/>
-                <a:ea typeface="Courier New" pitchFamily="34" charset="-122"/>
-                <a:cs typeface="Courier New" pitchFamily="34" charset="-120"/>
-              </a:rPr>
-              <a:t>type</a:t>
-            </a:r>
-            <a:r>
-              <a:rPr lang="en-US" sz="1050" dirty="0">
-                <a:solidFill>
-                  <a:srgbClr val="CCCCCC"/>
-                </a:solidFill>
-                <a:latin typeface="Courier New" pitchFamily="34" charset="0"/>
-                <a:ea typeface="Courier New" pitchFamily="34" charset="-122"/>
-                <a:cs typeface="Courier New" pitchFamily="34" charset="-120"/>
-              </a:rPr>
-              <a:t>:</a:t>
-            </a:r>
-            <a:r>
-              <a:rPr lang="en-US" sz="1050" dirty="0">
-                <a:solidFill>
-                  <a:srgbClr val="CCCCCC"/>
-                </a:solidFill>
-                <a:latin typeface="Courier New" pitchFamily="34" charset="0"/>
-                <a:ea typeface="Courier New" pitchFamily="34" charset="-122"/>
-                <a:cs typeface="Courier New" pitchFamily="34" charset="-120"/>
-              </a:rPr>
-              <a:t> </a:t>
-            </a:r>
-            <a:r>
-              <a:rPr lang="en-US" sz="1050" dirty="0">
-                <a:solidFill>
-                  <a:srgbClr val="CCCCCC"/>
-                </a:solidFill>
-                <a:latin typeface="Courier New" pitchFamily="34" charset="0"/>
-                <a:ea typeface="Courier New" pitchFamily="34" charset="-122"/>
-                <a:cs typeface="Courier New" pitchFamily="34" charset="-120"/>
-              </a:rPr>
-              <a:t>#</a:t>
-            </a:r>
-            <a:r>
-              <a:rPr lang="en-US" sz="1050" dirty="0">
-                <a:solidFill>
-                  <a:srgbClr val="CCCCCC"/>
-                </a:solidFill>
-                <a:latin typeface="Courier New" pitchFamily="34" charset="0"/>
-                <a:ea typeface="Courier New" pitchFamily="34" charset="-122"/>
-                <a:cs typeface="Courier New" pitchFamily="34" charset="-120"/>
-              </a:rPr>
-              <a:t>IDENTIFICATION_REFERENCE</a:t>
-            </a:r>
-            <a:r>
-              <a:rPr lang="en-US" sz="1050" dirty="0">
-                <a:solidFill>
-                  <a:srgbClr val="CCCCCC"/>
-                </a:solidFill>
-                <a:latin typeface="Courier New" pitchFamily="34" charset="0"/>
-                <a:ea typeface="Courier New" pitchFamily="34" charset="-122"/>
-                <a:cs typeface="Courier New" pitchFamily="34" charset="-120"/>
-              </a:rPr>
-              <a:t>,</a:t>
             </a:r>
             <a:endParaRPr lang="en-US" sz="1050" dirty="0"/>
           </a:p>
@@ -13964,18 +13722,51 @@
                 <a:ea typeface="Courier New" pitchFamily="34" charset="-122"/>
                 <a:cs typeface="Courier New" pitchFamily="34" charset="-120"/>
               </a:rPr>
-              <a:t>                </a:t>
-            </a:r>
-            <a:r>
-              <a:rPr lang="en-US" sz="1050" dirty="0">
-                <a:solidFill>
-                  <a:srgbClr val="CCCCCC"/>
-                </a:solidFill>
-                <a:latin typeface="Courier New" pitchFamily="34" charset="0"/>
-                <a:ea typeface="Courier New" pitchFamily="34" charset="-122"/>
-                <a:cs typeface="Courier New" pitchFamily="34" charset="-120"/>
-              </a:rPr>
-              <a:t>label</a:t>
+              <a:t>  </a:t>
+            </a:r>
+            <a:r>
+              <a:rPr lang="en-US" sz="1050" dirty="0">
+                <a:solidFill>
+                  <a:srgbClr val="CCCCCC"/>
+                </a:solidFill>
+                <a:latin typeface="Courier New" pitchFamily="34" charset="0"/>
+                <a:ea typeface="Courier New" pitchFamily="34" charset="-122"/>
+                <a:cs typeface="Courier New" pitchFamily="34" charset="-120"/>
+              </a:rPr>
+              <a:t>@</a:t>
+            </a:r>
+            <a:r>
+              <a:rPr lang="en-US" sz="1050" dirty="0">
+                <a:solidFill>
+                  <a:srgbClr val="CCCCCC"/>
+                </a:solidFill>
+                <a:latin typeface="Courier New" pitchFamily="34" charset="0"/>
+                <a:ea typeface="Courier New" pitchFamily="34" charset="-122"/>
+                <a:cs typeface="Courier New" pitchFamily="34" charset="-120"/>
+              </a:rPr>
+              <a:t>UI</a:t>
+            </a:r>
+            <a:r>
+              <a:rPr lang="en-US" sz="1050" dirty="0">
+                <a:solidFill>
+                  <a:srgbClr val="CCCCCC"/>
+                </a:solidFill>
+                <a:latin typeface="Courier New" pitchFamily="34" charset="0"/>
+                <a:ea typeface="Courier New" pitchFamily="34" charset="-122"/>
+                <a:cs typeface="Courier New" pitchFamily="34" charset="-120"/>
+              </a:rPr>
+              <a:t>.</a:t>
+            </a:r>
+            <a:r>
+              <a:rPr lang="en-US" sz="1050" dirty="0">
+                <a:solidFill>
+                  <a:srgbClr val="CCCCCC"/>
+                </a:solidFill>
+                <a:latin typeface="Courier New" pitchFamily="34" charset="0"/>
+                <a:ea typeface="Courier New" pitchFamily="34" charset="-122"/>
+                <a:cs typeface="Courier New" pitchFamily="34" charset="-120"/>
+              </a:rPr>
+              <a:t>facet</a:t>
             </a:r>
             <a:r>
               <a:rPr lang="en-US" sz="1050" dirty="0">
@@ -14002,13 +13793,79 @@
             <a:r>
               <a:rPr lang="en-US" sz="1050" dirty="0">
                 <a:solidFill>
+                  <a:srgbClr val="CCCCCC"/>
+                </a:solidFill>
+                <a:latin typeface="Courier New" pitchFamily="34" charset="0"/>
+                <a:ea typeface="Courier New" pitchFamily="34" charset="-122"/>
+                <a:cs typeface="Courier New" pitchFamily="34" charset="-120"/>
+              </a:rPr>
+              <a:t>[</a:t>
+            </a:r>
+            <a:r>
+              <a:rPr lang="en-US" sz="1050" dirty="0">
+                <a:solidFill>
+                  <a:srgbClr val="CCCCCC"/>
+                </a:solidFill>
+                <a:latin typeface="Courier New" pitchFamily="34" charset="0"/>
+                <a:ea typeface="Courier New" pitchFamily="34" charset="-122"/>
+                <a:cs typeface="Courier New" pitchFamily="34" charset="-120"/>
+              </a:rPr>
+              <a:t>{</a:t>
+            </a:r>
+            <a:r>
+              <a:rPr lang="en-US" sz="1050" dirty="0">
+                <a:solidFill>
+                  <a:srgbClr val="CCCCCC"/>
+                </a:solidFill>
+                <a:latin typeface="Courier New" pitchFamily="34" charset="0"/>
+                <a:ea typeface="Courier New" pitchFamily="34" charset="-122"/>
+                <a:cs typeface="Courier New" pitchFamily="34" charset="-120"/>
+              </a:rPr>
+              <a:t> </a:t>
+            </a:r>
+            <a:r>
+              <a:rPr lang="en-US" sz="1050" dirty="0">
+                <a:solidFill>
+                  <a:srgbClr val="CCCCCC"/>
+                </a:solidFill>
+                <a:latin typeface="Courier New" pitchFamily="34" charset="0"/>
+                <a:ea typeface="Courier New" pitchFamily="34" charset="-122"/>
+                <a:cs typeface="Courier New" pitchFamily="34" charset="-120"/>
+              </a:rPr>
+              <a:t>id</a:t>
+            </a:r>
+            <a:r>
+              <a:rPr lang="en-US" sz="1050" dirty="0">
+                <a:solidFill>
+                  <a:srgbClr val="CCCCCC"/>
+                </a:solidFill>
+                <a:latin typeface="Courier New" pitchFamily="34" charset="0"/>
+                <a:ea typeface="Courier New" pitchFamily="34" charset="-122"/>
+                <a:cs typeface="Courier New" pitchFamily="34" charset="-120"/>
+              </a:rPr>
+              <a:t>:</a:t>
+            </a:r>
+            <a:r>
+              <a:rPr lang="en-US" sz="1050" dirty="0">
+                <a:solidFill>
+                  <a:srgbClr val="CCCCCC"/>
+                </a:solidFill>
+                <a:latin typeface="Courier New" pitchFamily="34" charset="0"/>
+                <a:ea typeface="Courier New" pitchFamily="34" charset="-122"/>
+                <a:cs typeface="Courier New" pitchFamily="34" charset="-120"/>
+              </a:rPr>
+              <a:t> </a:t>
+            </a:r>
+            <a:r>
+              <a:rPr lang="en-US" sz="1050" dirty="0">
+                <a:solidFill>
                   <a:srgbClr val="CE9178"/>
                 </a:solidFill>
                 <a:latin typeface="Courier New" pitchFamily="34" charset="0"/>
                 <a:ea typeface="Courier New" pitchFamily="34" charset="-122"/>
                 <a:cs typeface="Courier New" pitchFamily="34" charset="-120"/>
               </a:rPr>
-              <a:t>'Viagem'</a:t>
+              <a:t>'DadosPedido'</a:t>
             </a:r>
             <a:r>
               <a:rPr lang="en-US" sz="1050" dirty="0">
@@ -14041,7 +13898,7 @@
                 <a:ea typeface="Courier New" pitchFamily="34" charset="-122"/>
                 <a:cs typeface="Courier New" pitchFamily="34" charset="-120"/>
               </a:rPr>
-              <a:t>position</a:t>
+              <a:t>type</a:t>
             </a:r>
             <a:r>
               <a:rPr lang="en-US" sz="1050" dirty="0">
@@ -14068,46 +13925,35 @@
             <a:r>
               <a:rPr lang="en-US" sz="1050" dirty="0">
                 <a:solidFill>
-                  <a:srgbClr val="B5CEA8"/>
-                </a:solidFill>
-                <a:latin typeface="Courier New" pitchFamily="34" charset="0"/>
-                <a:ea typeface="Courier New" pitchFamily="34" charset="-122"/>
-                <a:cs typeface="Courier New" pitchFamily="34" charset="-120"/>
-              </a:rPr>
-              <a:t>10</a:t>
-            </a:r>
-            <a:r>
-              <a:rPr lang="en-US" sz="1050" dirty="0">
-                <a:solidFill>
-                  <a:srgbClr val="CCCCCC"/>
-                </a:solidFill>
-                <a:latin typeface="Courier New" pitchFamily="34" charset="0"/>
-                <a:ea typeface="Courier New" pitchFamily="34" charset="-122"/>
-                <a:cs typeface="Courier New" pitchFamily="34" charset="-120"/>
-              </a:rPr>
-              <a:t> </a:t>
-            </a:r>
-            <a:r>
-              <a:rPr lang="en-US" sz="1050" dirty="0">
-                <a:solidFill>
-                  <a:srgbClr val="CCCCCC"/>
-                </a:solidFill>
-                <a:latin typeface="Courier New" pitchFamily="34" charset="0"/>
-                <a:ea typeface="Courier New" pitchFamily="34" charset="-122"/>
-                <a:cs typeface="Courier New" pitchFamily="34" charset="-120"/>
-              </a:rPr>
-              <a:t>}</a:t>
-            </a:r>
-            <a:r>
-              <a:rPr lang="en-US" sz="1050" dirty="0">
-                <a:solidFill>
-                  <a:srgbClr val="CCCCCC"/>
-                </a:solidFill>
-                <a:latin typeface="Courier New" pitchFamily="34" charset="0"/>
-                <a:ea typeface="Courier New" pitchFamily="34" charset="-122"/>
-                <a:cs typeface="Courier New" pitchFamily="34" charset="-120"/>
-              </a:rPr>
-              <a:t>]</a:t>
+                  <a:srgbClr val="CCCCCC"/>
+                </a:solidFill>
+                <a:latin typeface="Courier New" pitchFamily="34" charset="0"/>
+                <a:ea typeface="Courier New" pitchFamily="34" charset="-122"/>
+                <a:cs typeface="Courier New" pitchFamily="34" charset="-120"/>
+              </a:rPr>
+              <a:t>#</a:t>
+            </a:r>
+            <a:r>
+              <a:rPr lang="en-US" sz="1050" dirty="0">
+                <a:solidFill>
+                  <a:srgbClr val="CCCCCC"/>
+                </a:solidFill>
+                <a:latin typeface="Courier New" pitchFamily="34" charset="0"/>
+                <a:ea typeface="Courier New" pitchFamily="34" charset="-122"/>
+                <a:cs typeface="Courier New" pitchFamily="34" charset="-120"/>
+              </a:rPr>
+              <a:t>IDENTIFICATION_REFERENCE</a:t>
+            </a:r>
+            <a:r>
+              <a:rPr lang="en-US" sz="1050" dirty="0">
+                <a:solidFill>
+                  <a:srgbClr val="CCCCCC"/>
+                </a:solidFill>
+                <a:latin typeface="Courier New" pitchFamily="34" charset="0"/>
+                <a:ea typeface="Courier New" pitchFamily="34" charset="-122"/>
+                <a:cs typeface="Courier New" pitchFamily="34" charset="-120"/>
+              </a:rPr>
+              <a:t>,</a:t>
             </a:r>
             <a:endParaRPr lang="en-US" sz="1050" dirty="0"/>
           </a:p>
@@ -14127,51 +13973,18 @@
                 <a:ea typeface="Courier New" pitchFamily="34" charset="-122"/>
                 <a:cs typeface="Courier New" pitchFamily="34" charset="-120"/>
               </a:rPr>
-              <a:t>  </a:t>
-            </a:r>
-            <a:r>
-              <a:rPr lang="en-US" sz="1050" dirty="0">
-                <a:solidFill>
-                  <a:srgbClr val="CCCCCC"/>
-                </a:solidFill>
-                <a:latin typeface="Courier New" pitchFamily="34" charset="0"/>
-                <a:ea typeface="Courier New" pitchFamily="34" charset="-122"/>
-                <a:cs typeface="Courier New" pitchFamily="34" charset="-120"/>
-              </a:rPr>
-              <a:t>@</a:t>
-            </a:r>
-            <a:r>
-              <a:rPr lang="en-US" sz="1050" dirty="0">
-                <a:solidFill>
-                  <a:srgbClr val="CCCCCC"/>
-                </a:solidFill>
-                <a:latin typeface="Courier New" pitchFamily="34" charset="0"/>
-                <a:ea typeface="Courier New" pitchFamily="34" charset="-122"/>
-                <a:cs typeface="Courier New" pitchFamily="34" charset="-120"/>
-              </a:rPr>
-              <a:t>UI</a:t>
-            </a:r>
-            <a:r>
-              <a:rPr lang="en-US" sz="1050" dirty="0">
-                <a:solidFill>
-                  <a:srgbClr val="CCCCCC"/>
-                </a:solidFill>
-                <a:latin typeface="Courier New" pitchFamily="34" charset="0"/>
-                <a:ea typeface="Courier New" pitchFamily="34" charset="-122"/>
-                <a:cs typeface="Courier New" pitchFamily="34" charset="-120"/>
-              </a:rPr>
-              <a:t>.</a:t>
-            </a:r>
-            <a:r>
-              <a:rPr lang="en-US" sz="1050" dirty="0">
-                <a:solidFill>
-                  <a:srgbClr val="CCCCCC"/>
-                </a:solidFill>
-                <a:latin typeface="Courier New" pitchFamily="34" charset="0"/>
-                <a:ea typeface="Courier New" pitchFamily="34" charset="-122"/>
-                <a:cs typeface="Courier New" pitchFamily="34" charset="-120"/>
-              </a:rPr>
-              <a:t>lineItem</a:t>
+              <a:t>                </a:t>
+            </a:r>
+            <a:r>
+              <a:rPr lang="en-US" sz="1050" dirty="0">
+                <a:solidFill>
+                  <a:srgbClr val="CCCCCC"/>
+                </a:solidFill>
+                <a:latin typeface="Courier New" pitchFamily="34" charset="0"/>
+                <a:ea typeface="Courier New" pitchFamily="34" charset="-122"/>
+                <a:cs typeface="Courier New" pitchFamily="34" charset="-120"/>
+              </a:rPr>
+              <a:t>label</a:t>
             </a:r>
             <a:r>
               <a:rPr lang="en-US" sz="1050" dirty="0">
@@ -14193,44 +14006,44 @@
                 <a:ea typeface="Courier New" pitchFamily="34" charset="-122"/>
                 <a:cs typeface="Courier New" pitchFamily="34" charset="-120"/>
               </a:rPr>
-              <a:t>       </a:t>
-            </a:r>
-            <a:r>
-              <a:rPr lang="en-US" sz="1050" dirty="0">
-                <a:solidFill>
-                  <a:srgbClr val="CCCCCC"/>
-                </a:solidFill>
-                <a:latin typeface="Courier New" pitchFamily="34" charset="0"/>
-                <a:ea typeface="Courier New" pitchFamily="34" charset="-122"/>
-                <a:cs typeface="Courier New" pitchFamily="34" charset="-120"/>
-              </a:rPr>
-              <a:t>[</a:t>
-            </a:r>
-            <a:r>
-              <a:rPr lang="en-US" sz="1050" dirty="0">
-                <a:solidFill>
-                  <a:srgbClr val="CCCCCC"/>
-                </a:solidFill>
-                <a:latin typeface="Courier New" pitchFamily="34" charset="0"/>
-                <a:ea typeface="Courier New" pitchFamily="34" charset="-122"/>
-                <a:cs typeface="Courier New" pitchFamily="34" charset="-120"/>
-              </a:rPr>
-              <a:t>{</a:t>
-            </a:r>
-            <a:r>
-              <a:rPr lang="en-US" sz="1050" dirty="0">
-                <a:solidFill>
-                  <a:srgbClr val="CCCCCC"/>
-                </a:solidFill>
-                <a:latin typeface="Courier New" pitchFamily="34" charset="0"/>
-                <a:ea typeface="Courier New" pitchFamily="34" charset="-122"/>
-                <a:cs typeface="Courier New" pitchFamily="34" charset="-120"/>
-              </a:rPr>
               <a:t> </a:t>
             </a:r>
             <a:r>
               <a:rPr lang="en-US" sz="1050" dirty="0">
                 <a:solidFill>
+                  <a:srgbClr val="CE9178"/>
+                </a:solidFill>
+                <a:latin typeface="Courier New" pitchFamily="34" charset="0"/>
+                <a:ea typeface="Courier New" pitchFamily="34" charset="-122"/>
+                <a:cs typeface="Courier New" pitchFamily="34" charset="-120"/>
+              </a:rPr>
+              <a:t>'Dados do Pedido'</a:t>
+            </a:r>
+            <a:r>
+              <a:rPr lang="en-US" sz="1050" dirty="0">
+                <a:solidFill>
+                  <a:srgbClr val="CCCCCC"/>
+                </a:solidFill>
+                <a:latin typeface="Courier New" pitchFamily="34" charset="0"/>
+                <a:ea typeface="Courier New" pitchFamily="34" charset="-122"/>
+                <a:cs typeface="Courier New" pitchFamily="34" charset="-120"/>
+              </a:rPr>
+              <a:t>,</a:t>
+            </a:r>
+            <a:r>
+              <a:rPr lang="en-US" sz="1050" dirty="0">
+                <a:solidFill>
+                  <a:srgbClr val="CCCCCC"/>
+                </a:solidFill>
+                <a:latin typeface="Courier New" pitchFamily="34" charset="0"/>
+                <a:ea typeface="Courier New" pitchFamily="34" charset="-122"/>
+                <a:cs typeface="Courier New" pitchFamily="34" charset="-120"/>
+              </a:rPr>
+              <a:t> </a:t>
+            </a:r>
+            <a:r>
+              <a:rPr lang="en-US" sz="1050" dirty="0">
+                <a:solidFill>
                   <a:srgbClr val="CCCCCC"/>
                 </a:solidFill>
                 <a:latin typeface="Courier New" pitchFamily="34" charset="0"/>
@@ -14270,7 +14083,7 @@
                 <a:ea typeface="Courier New" pitchFamily="34" charset="-122"/>
                 <a:cs typeface="Courier New" pitchFamily="34" charset="-120"/>
               </a:rPr>
-              <a:t>10</a:t>
+              <a:t>20</a:t>
             </a:r>
             <a:r>
               <a:rPr lang="en-US" sz="1050" dirty="0">
@@ -14367,7 +14180,7 @@
                 <a:ea typeface="Courier New" pitchFamily="34" charset="-122"/>
                 <a:cs typeface="Courier New" pitchFamily="34" charset="-120"/>
               </a:rPr>
-              <a:t>selectionField</a:t>
+              <a:t>lineItem</a:t>
             </a:r>
             <a:r>
               <a:rPr lang="en-US" sz="1050" dirty="0">
@@ -14389,6 +14202,39 @@
                 <a:ea typeface="Courier New" pitchFamily="34" charset="-122"/>
                 <a:cs typeface="Courier New" pitchFamily="34" charset="-120"/>
               </a:rPr>
+              <a:t>       </a:t>
+            </a:r>
+            <a:r>
+              <a:rPr lang="en-US" sz="1050" dirty="0">
+                <a:solidFill>
+                  <a:srgbClr val="CCCCCC"/>
+                </a:solidFill>
+                <a:latin typeface="Courier New" pitchFamily="34" charset="0"/>
+                <a:ea typeface="Courier New" pitchFamily="34" charset="-122"/>
+                <a:cs typeface="Courier New" pitchFamily="34" charset="-120"/>
+              </a:rPr>
+              <a:t>[</a:t>
+            </a:r>
+            <a:r>
+              <a:rPr lang="en-US" sz="1050" dirty="0">
+                <a:solidFill>
+                  <a:srgbClr val="CCCCCC"/>
+                </a:solidFill>
+                <a:latin typeface="Courier New" pitchFamily="34" charset="0"/>
+                <a:ea typeface="Courier New" pitchFamily="34" charset="-122"/>
+                <a:cs typeface="Courier New" pitchFamily="34" charset="-120"/>
+              </a:rPr>
+              <a:t>{</a:t>
+            </a:r>
+            <a:r>
+              <a:rPr lang="en-US" sz="1050" dirty="0">
+                <a:solidFill>
+                  <a:srgbClr val="CCCCCC"/>
+                </a:solidFill>
+                <a:latin typeface="Courier New" pitchFamily="34" charset="0"/>
+                <a:ea typeface="Courier New" pitchFamily="34" charset="-122"/>
+                <a:cs typeface="Courier New" pitchFamily="34" charset="-120"/>
+              </a:rPr>
               <a:t> </a:t>
             </a:r>
             <a:r>
@@ -14400,18 +14246,18 @@
                 <a:ea typeface="Courier New" pitchFamily="34" charset="-122"/>
                 <a:cs typeface="Courier New" pitchFamily="34" charset="-120"/>
               </a:rPr>
-              <a:t>[</a:t>
-            </a:r>
-            <a:r>
-              <a:rPr lang="en-US" sz="1050" dirty="0">
-                <a:solidFill>
-                  <a:srgbClr val="CCCCCC"/>
-                </a:solidFill>
-                <a:latin typeface="Courier New" pitchFamily="34" charset="0"/>
-                <a:ea typeface="Courier New" pitchFamily="34" charset="-122"/>
-                <a:cs typeface="Courier New" pitchFamily="34" charset="-120"/>
-              </a:rPr>
-              <a:t>{</a:t>
+              <a:t>position</a:t>
+            </a:r>
+            <a:r>
+              <a:rPr lang="en-US" sz="1050" dirty="0">
+                <a:solidFill>
+                  <a:srgbClr val="CCCCCC"/>
+                </a:solidFill>
+                <a:latin typeface="Courier New" pitchFamily="34" charset="0"/>
+                <a:ea typeface="Courier New" pitchFamily="34" charset="-122"/>
+                <a:cs typeface="Courier New" pitchFamily="34" charset="-120"/>
+              </a:rPr>
+              <a:t>:</a:t>
             </a:r>
             <a:r>
               <a:rPr lang="en-US" sz="1050" dirty="0">
@@ -14427,13 +14273,46 @@
             <a:r>
               <a:rPr lang="en-US" sz="1050" dirty="0">
                 <a:solidFill>
-                  <a:srgbClr val="CCCCCC"/>
-                </a:solidFill>
-                <a:latin typeface="Courier New" pitchFamily="34" charset="0"/>
-                <a:ea typeface="Courier New" pitchFamily="34" charset="-122"/>
-                <a:cs typeface="Courier New" pitchFamily="34" charset="-120"/>
-              </a:rPr>
-              <a:t>position</a:t>
+                  <a:srgbClr val="B5CEA8"/>
+                </a:solidFill>
+                <a:latin typeface="Courier New" pitchFamily="34" charset="0"/>
+                <a:ea typeface="Courier New" pitchFamily="34" charset="-122"/>
+                <a:cs typeface="Courier New" pitchFamily="34" charset="-120"/>
+              </a:rPr>
+              <a:t>10</a:t>
+            </a:r>
+            <a:r>
+              <a:rPr lang="en-US" sz="1050" dirty="0">
+                <a:solidFill>
+                  <a:srgbClr val="CCCCCC"/>
+                </a:solidFill>
+                <a:latin typeface="Courier New" pitchFamily="34" charset="0"/>
+                <a:ea typeface="Courier New" pitchFamily="34" charset="-122"/>
+                <a:cs typeface="Courier New" pitchFamily="34" charset="-120"/>
+              </a:rPr>
+              <a:t>,</a:t>
+            </a:r>
+            <a:r>
+              <a:rPr lang="en-US" sz="1050" dirty="0">
+                <a:solidFill>
+                  <a:srgbClr val="CCCCCC"/>
+                </a:solidFill>
+                <a:latin typeface="Courier New" pitchFamily="34" charset="0"/>
+                <a:ea typeface="Courier New" pitchFamily="34" charset="-122"/>
+                <a:cs typeface="Courier New" pitchFamily="34" charset="-120"/>
+              </a:rPr>
+              <a:t> </a:t>
+            </a:r>
+            <a:r>
+              <a:rPr lang="en-US" sz="1050" dirty="0">
+                <a:solidFill>
+                  <a:srgbClr val="CCCCCC"/>
+                </a:solidFill>
+                <a:latin typeface="Courier New" pitchFamily="34" charset="0"/>
+                <a:ea typeface="Courier New" pitchFamily="34" charset="-122"/>
+                <a:cs typeface="Courier New" pitchFamily="34" charset="-120"/>
+              </a:rPr>
+              <a:t>label</a:t>
             </a:r>
             <a:r>
               <a:rPr lang="en-US" sz="1050" dirty="0">
@@ -14460,13 +14339,13 @@
             <a:r>
               <a:rPr lang="en-US" sz="1050" dirty="0">
                 <a:solidFill>
-                  <a:srgbClr val="B5CEA8"/>
-                </a:solidFill>
-                <a:latin typeface="Courier New" pitchFamily="34" charset="0"/>
-                <a:ea typeface="Courier New" pitchFamily="34" charset="-122"/>
-                <a:cs typeface="Courier New" pitchFamily="34" charset="-120"/>
-              </a:rPr>
-              <a:t>10</a:t>
+                  <a:srgbClr val="CE9178"/>
+                </a:solidFill>
+                <a:latin typeface="Courier New" pitchFamily="34" charset="0"/>
+                <a:ea typeface="Courier New" pitchFamily="34" charset="-122"/>
+                <a:cs typeface="Courier New" pitchFamily="34" charset="-120"/>
+              </a:rPr>
+              <a:t>'Pedido'</a:t>
             </a:r>
             <a:r>
               <a:rPr lang="en-US" sz="1050" dirty="0">
@@ -14673,6 +14552,72 @@
                 <a:ea typeface="Courier New" pitchFamily="34" charset="-122"/>
                 <a:cs typeface="Courier New" pitchFamily="34" charset="-120"/>
               </a:rPr>
+              <a:t>,</a:t>
+            </a:r>
+            <a:r>
+              <a:rPr lang="en-US" sz="1050" dirty="0">
+                <a:solidFill>
+                  <a:srgbClr val="CCCCCC"/>
+                </a:solidFill>
+                <a:latin typeface="Courier New" pitchFamily="34" charset="0"/>
+                <a:ea typeface="Courier New" pitchFamily="34" charset="-122"/>
+                <a:cs typeface="Courier New" pitchFamily="34" charset="-120"/>
+              </a:rPr>
+              <a:t> </a:t>
+            </a:r>
+            <a:r>
+              <a:rPr lang="en-US" sz="1050" dirty="0">
+                <a:solidFill>
+                  <a:srgbClr val="CCCCCC"/>
+                </a:solidFill>
+                <a:latin typeface="Courier New" pitchFamily="34" charset="0"/>
+                <a:ea typeface="Courier New" pitchFamily="34" charset="-122"/>
+                <a:cs typeface="Courier New" pitchFamily="34" charset="-120"/>
+              </a:rPr>
+              <a:t>label</a:t>
+            </a:r>
+            <a:r>
+              <a:rPr lang="en-US" sz="1050" dirty="0">
+                <a:solidFill>
+                  <a:srgbClr val="CCCCCC"/>
+                </a:solidFill>
+                <a:latin typeface="Courier New" pitchFamily="34" charset="0"/>
+                <a:ea typeface="Courier New" pitchFamily="34" charset="-122"/>
+                <a:cs typeface="Courier New" pitchFamily="34" charset="-120"/>
+              </a:rPr>
+              <a:t>:</a:t>
+            </a:r>
+            <a:r>
+              <a:rPr lang="en-US" sz="1050" dirty="0">
+                <a:solidFill>
+                  <a:srgbClr val="CCCCCC"/>
+                </a:solidFill>
+                <a:latin typeface="Courier New" pitchFamily="34" charset="0"/>
+                <a:ea typeface="Courier New" pitchFamily="34" charset="-122"/>
+                <a:cs typeface="Courier New" pitchFamily="34" charset="-120"/>
+              </a:rPr>
+              <a:t> </a:t>
+            </a:r>
+            <a:r>
+              <a:rPr lang="en-US" sz="1050" dirty="0">
+                <a:solidFill>
+                  <a:srgbClr val="CE9178"/>
+                </a:solidFill>
+                <a:latin typeface="Courier New" pitchFamily="34" charset="0"/>
+                <a:ea typeface="Courier New" pitchFamily="34" charset="-122"/>
+                <a:cs typeface="Courier New" pitchFamily="34" charset="-120"/>
+              </a:rPr>
+              <a:t>'Número do pedido'</a:t>
+            </a:r>
+            <a:r>
+              <a:rPr lang="en-US" sz="1050" dirty="0">
+                <a:solidFill>
+                  <a:srgbClr val="CCCCCC"/>
+                </a:solidFill>
+                <a:latin typeface="Courier New" pitchFamily="34" charset="0"/>
+                <a:ea typeface="Courier New" pitchFamily="34" charset="-122"/>
+                <a:cs typeface="Courier New" pitchFamily="34" charset="-120"/>
+              </a:rPr>
               <a:t> </a:t>
             </a:r>
             <a:r>
@@ -14726,7 +14671,7 @@
                 <a:ea typeface="Courier New" pitchFamily="34" charset="-122"/>
                 <a:cs typeface="Courier New" pitchFamily="34" charset="-120"/>
               </a:rPr>
-              <a:t>TravelID</a:t>
+              <a:t>NumeroPedido</a:t>
             </a:r>
             <a:r>
               <a:rPr lang="en-US" sz="1050" dirty="0">
@@ -14920,7 +14865,7 @@
                 <a:ea typeface="Courier New" pitchFamily="34" charset="-122"/>
                 <a:cs typeface="Courier New" pitchFamily="34" charset="-120"/>
               </a:rPr>
-              <a:t>20</a:t>
+              <a:t>40</a:t>
             </a:r>
             <a:r>
               <a:rPr lang="en-US" sz="1050" dirty="0">
@@ -14986,7 +14931,7 @@
                 <a:ea typeface="Courier New" pitchFamily="34" charset="-122"/>
                 <a:cs typeface="Courier New" pitchFamily="34" charset="-120"/>
               </a:rPr>
-              <a:t>'StatusCriticality'</a:t>
+              <a:t>'StatusPedidoCriticality'</a:t>
             </a:r>
             <a:r>
               <a:rPr lang="en-US" sz="1050" dirty="0">
@@ -15083,7 +15028,7 @@
                 <a:ea typeface="Courier New" pitchFamily="34" charset="-122"/>
                 <a:cs typeface="Courier New" pitchFamily="34" charset="-120"/>
               </a:rPr>
-              <a:t>identification</a:t>
+              <a:t>selectionField</a:t>
             </a:r>
             <a:r>
               <a:rPr lang="en-US" sz="1050" dirty="0">
@@ -15182,7 +15127,7 @@
                 <a:ea typeface="Courier New" pitchFamily="34" charset="-122"/>
                 <a:cs typeface="Courier New" pitchFamily="34" charset="-120"/>
               </a:rPr>
-              <a:t>20</a:t>
+              <a:t>30</a:t>
             </a:r>
             <a:r>
               <a:rPr lang="en-US" sz="1050" dirty="0">
@@ -15246,7 +15191,7 @@
                 <a:ea typeface="Courier New" pitchFamily="34" charset="-122"/>
                 <a:cs typeface="Courier New" pitchFamily="34" charset="-120"/>
               </a:rPr>
-              <a:t>OverallStatus</a:t>
+              <a:t>StatusPedido</a:t>
             </a:r>
             <a:r>
               <a:rPr lang="en-US" sz="1050" dirty="0">
